--- a/APG_TrenchVerify_Pitch_1.pptx
+++ b/APG_TrenchVerify_Pitch_1.pptx
@@ -3287,7 +3287,7 @@
           <a:p>
             <a:pPr algn="l"/>
             <a:r>
-              <a:rPr sz="1400" b="0" i="0">
+              <a:rPr sz="1400" b="0" i="0" dirty="0">
                 <a:solidFill>
                   <a:srgbClr val="CCD6E0"/>
                 </a:solidFill>
@@ -3305,29 +3305,113 @@
         </p:nvSpPr>
         <p:spPr>
           <a:xfrm>
-            <a:off x="640080" y="5852160"/>
-            <a:ext cx="7315200" cy="457200"/>
-          </a:xfrm>
-          <a:prstGeom prst="rect">
-            <a:avLst/>
-          </a:prstGeom>
-          <a:noFill/>
-        </p:spPr>
-        <p:txBody>
-          <a:bodyPr wrap="square">
-            <a:spAutoFit/>
-          </a:bodyPr>
-          <a:lstStyle/>
-          <a:p>
-            <a:pPr algn="l"/>
-            <a:r>
-              <a:rPr sz="1300" b="0" i="0">
+            <a:off x="536448" y="5230368"/>
+            <a:ext cx="7418832" cy="369332"/>
+          </a:xfrm>
+          <a:prstGeom prst="rect">
+            <a:avLst/>
+          </a:prstGeom>
+          <a:noFill/>
+        </p:spPr>
+        <p:txBody>
+          <a:bodyPr wrap="square">
+            <a:spAutoFit/>
+          </a:bodyPr>
+          <a:lstStyle/>
+          <a:p>
+            <a:r>
+              <a:rPr b="0" i="0" dirty="0">
                 <a:solidFill>
                   <a:srgbClr val="CCD6E0"/>
                 </a:solidFill>
               </a:rPr>
-              <a:t>Team: [Name 1]  ·  [Name 2]  ·  [Name 3]</a:t>
-            </a:r>
+              <a:t>Team</a:t>
+            </a:r>
+            <a:r>
+              <a:rPr lang="en-US" b="0" i="0" dirty="0">
+                <a:solidFill>
+                  <a:srgbClr val="CCD6E0"/>
+                </a:solidFill>
+              </a:rPr>
+              <a:t> – 42 </a:t>
+            </a:r>
+            <a:r>
+              <a:rPr lang="en-US" b="0" i="0" dirty="0" err="1">
+                <a:solidFill>
+                  <a:srgbClr val="CCD6E0"/>
+                </a:solidFill>
+              </a:rPr>
+              <a:t>Cloudettes</a:t>
+            </a:r>
+            <a:r>
+              <a:rPr b="0" i="0" dirty="0">
+                <a:solidFill>
+                  <a:srgbClr val="CCD6E0"/>
+                </a:solidFill>
+              </a:rPr>
+              <a:t>: [</a:t>
+            </a:r>
+            <a:r>
+              <a:rPr lang="en-US" b="0" i="0" dirty="0">
+                <a:solidFill>
+                  <a:srgbClr val="CCD6E0"/>
+                </a:solidFill>
+              </a:rPr>
+              <a:t>Ahmed</a:t>
+            </a:r>
+            <a:r>
+              <a:rPr b="0" i="0" dirty="0">
+                <a:solidFill>
+                  <a:srgbClr val="CCD6E0"/>
+                </a:solidFill>
+              </a:rPr>
+              <a:t>]  ·  [</a:t>
+            </a:r>
+            <a:r>
+              <a:rPr lang="en-US" dirty="0">
+                <a:solidFill>
+                  <a:srgbClr val="CCD6E0"/>
+                </a:solidFill>
+              </a:rPr>
+              <a:t>Tino</a:t>
+            </a:r>
+            <a:r>
+              <a:rPr b="0" i="0" dirty="0">
+                <a:solidFill>
+                  <a:srgbClr val="CCD6E0"/>
+                </a:solidFill>
+              </a:rPr>
+              <a:t>]  ·  [</a:t>
+            </a:r>
+            <a:r>
+              <a:rPr lang="en-US" b="0" i="0" dirty="0" err="1">
+                <a:solidFill>
+                  <a:srgbClr val="CCD6E0"/>
+                </a:solidFill>
+              </a:rPr>
+              <a:t>Evgenie</a:t>
+            </a:r>
+            <a:r>
+              <a:rPr b="0" i="0" dirty="0">
+                <a:solidFill>
+                  <a:srgbClr val="CCD6E0"/>
+                </a:solidFill>
+              </a:rPr>
+              <a:t>]</a:t>
+            </a:r>
+            <a:r>
+              <a:rPr lang="en-IN" dirty="0">
+                <a:solidFill>
+                  <a:srgbClr val="CCD6E0"/>
+                </a:solidFill>
+              </a:rPr>
+              <a:t> ]  ·  [Himani]</a:t>
+            </a:r>
+            <a:endParaRPr b="0" i="0" dirty="0">
+              <a:solidFill>
+                <a:srgbClr val="CCD6E0"/>
+              </a:solidFill>
+            </a:endParaRPr>
           </a:p>
         </p:txBody>
       </p:sp>
